--- a/generated/Tier 1 Broker Scorecards/Bolanos Commercial Enterprise, LLC_Broker_Scorecard.pptx
+++ b/generated/Tier 1 Broker Scorecards/Bolanos Commercial Enterprise, LLC_Broker_Scorecard.pptx
@@ -4581,7 +4581,7 @@
                         <a:rPr sz="800">
                           <a:latin typeface="Segoe UI"/>
                         </a:rPr>
-                        <a:t>50.0%</a:t>
+                        <a:t>52.4%</a:t>
                       </a:r>
                     </a:p>
                   </a:txBody>
@@ -4866,7 +4866,7 @@
                         <a:rPr sz="800">
                           <a:latin typeface="Segoe UI"/>
                         </a:rPr>
-                        <a:t>21</a:t>
+                        <a:t>22</a:t>
                       </a:r>
                     </a:p>
                   </a:txBody>

--- a/generated/Tier 1 Broker Scorecards/Bolanos Commercial Enterprise, LLC_Broker_Scorecard.pptx
+++ b/generated/Tier 1 Broker Scorecards/Bolanos Commercial Enterprise, LLC_Broker_Scorecard.pptx
@@ -3394,7 +3394,7 @@
                         <a:rPr sz="900">
                           <a:latin typeface="Segoe UI"/>
                         </a:rPr>
-                        <a:t>Tier 1  |  13.08% / 15.00%</a:t>
+                        <a:t>Tier 1  |  12.98% / 15.00%</a:t>
                       </a:r>
                     </a:p>
                   </a:txBody>
@@ -3690,7 +3690,7 @@
                         <a:rPr sz="900">
                           <a:latin typeface="Segoe UI"/>
                         </a:rPr>
-                        <a:t>Fleet Bound Premium: $44,298.50</a:t>
+                        <a:t>Fleet Bound Premium: $44,422.00</a:t>
                       </a:r>
                     </a:p>
                   </a:txBody>
@@ -3727,7 +3727,7 @@
                         <a:rPr sz="900">
                           <a:latin typeface="Segoe UI"/>
                         </a:rPr>
-                        <a:t>Fleet Book %: 32.9%</a:t>
+                        <a:t>Fleet Book %: 33.0%</a:t>
                       </a:r>
                     </a:p>
                   </a:txBody>
@@ -3766,7 +3766,7 @@
                         <a:rPr sz="900">
                           <a:latin typeface="Segoe UI"/>
                         </a:rPr>
-                        <a:t>Non-Fleet Subs: 126  |  Binds: 16</a:t>
+                        <a:t>Non-Fleet Subs: 127  |  Binds: 16</a:t>
                       </a:r>
                     </a:p>
                   </a:txBody>
@@ -3803,7 +3803,7 @@
                         <a:rPr sz="900">
                           <a:latin typeface="Segoe UI"/>
                         </a:rPr>
-                        <a:t>Non-Fleet Bound Premium: $90,504.31</a:t>
+                        <a:t>Non-Fleet Bound Premium: $90,380.81</a:t>
                       </a:r>
                     </a:p>
                   </a:txBody>
@@ -3840,7 +3840,7 @@
                         <a:rPr sz="900">
                           <a:latin typeface="Segoe UI"/>
                         </a:rPr>
-                        <a:t>Non-Fleet Book %: 67.1%</a:t>
+                        <a:t>Non-Fleet Book %: 67.0%</a:t>
                       </a:r>
                     </a:p>
                   </a:txBody>
@@ -4428,7 +4428,7 @@
                           </a:solidFill>
                           <a:latin typeface="Segoe UI"/>
                         </a:rPr>
-                        <a:t>18</a:t>
+                        <a:t>19</a:t>
                       </a:r>
                     </a:p>
                   </a:txBody>
@@ -4581,7 +4581,7 @@
                         <a:rPr sz="800">
                           <a:latin typeface="Segoe UI"/>
                         </a:rPr>
-                        <a:t>52.4%</a:t>
+                        <a:t>47.6%</a:t>
                       </a:r>
                     </a:p>
                   </a:txBody>
@@ -4707,7 +4707,7 @@
                           </a:solidFill>
                           <a:latin typeface="Segoe UI"/>
                         </a:rPr>
-                        <a:t>11.1%</a:t>
+                        <a:t>10.5%</a:t>
                       </a:r>
                     </a:p>
                   </a:txBody>
@@ -4866,7 +4866,7 @@
                         <a:rPr sz="800">
                           <a:latin typeface="Segoe UI"/>
                         </a:rPr>
-                        <a:t>22</a:t>
+                        <a:t>20</a:t>
                       </a:r>
                     </a:p>
                   </a:txBody>

--- a/generated/Tier 1 Broker Scorecards/Bolanos Commercial Enterprise, LLC_Broker_Scorecard.pptx
+++ b/generated/Tier 1 Broker Scorecards/Bolanos Commercial Enterprise, LLC_Broker_Scorecard.pptx
@@ -3394,7 +3394,7 @@
                         <a:rPr sz="900">
                           <a:latin typeface="Segoe UI"/>
                         </a:rPr>
-                        <a:t>Tier 1  |  12.98% / 15.00%</a:t>
+                        <a:t>Tier 1  |  12.78% / 15.00%</a:t>
                       </a:r>
                     </a:p>
                   </a:txBody>
@@ -3766,7 +3766,7 @@
                         <a:rPr sz="900">
                           <a:latin typeface="Segoe UI"/>
                         </a:rPr>
-                        <a:t>Non-Fleet Subs: 127  |  Binds: 16</a:t>
+                        <a:t>Non-Fleet Subs: 129  |  Binds: 16</a:t>
                       </a:r>
                     </a:p>
                   </a:txBody>
@@ -4428,7 +4428,7 @@
                           </a:solidFill>
                           <a:latin typeface="Segoe UI"/>
                         </a:rPr>
-                        <a:t>19</a:t>
+                        <a:t>21</a:t>
                       </a:r>
                     </a:p>
                   </a:txBody>
@@ -4581,7 +4581,7 @@
                         <a:rPr sz="800">
                           <a:latin typeface="Segoe UI"/>
                         </a:rPr>
-                        <a:t>47.6%</a:t>
+                        <a:t>52.4%</a:t>
                       </a:r>
                     </a:p>
                   </a:txBody>
@@ -4707,7 +4707,7 @@
                           </a:solidFill>
                           <a:latin typeface="Segoe UI"/>
                         </a:rPr>
-                        <a:t>10.5%</a:t>
+                        <a:t>9.5%</a:t>
                       </a:r>
                     </a:p>
                   </a:txBody>
@@ -4866,7 +4866,7 @@
                         <a:rPr sz="800">
                           <a:latin typeface="Segoe UI"/>
                         </a:rPr>
-                        <a:t>20</a:t>
+                        <a:t>22</a:t>
                       </a:r>
                     </a:p>
                   </a:txBody>

--- a/generated/Tier 1 Broker Scorecards/Bolanos Commercial Enterprise, LLC_Broker_Scorecard.pptx
+++ b/generated/Tier 1 Broker Scorecards/Bolanos Commercial Enterprise, LLC_Broker_Scorecard.pptx
@@ -4581,7 +4581,7 @@
                         <a:rPr sz="800">
                           <a:latin typeface="Segoe UI"/>
                         </a:rPr>
-                        <a:t>52.4%</a:t>
+                        <a:t>50.0%</a:t>
                       </a:r>
                     </a:p>
                   </a:txBody>
@@ -4866,7 +4866,7 @@
                         <a:rPr sz="800">
                           <a:latin typeface="Segoe UI"/>
                         </a:rPr>
-                        <a:t>22</a:t>
+                        <a:t>21</a:t>
                       </a:r>
                     </a:p>
                   </a:txBody>

--- a/generated/Tier 1 Broker Scorecards/Bolanos Commercial Enterprise, LLC_Broker_Scorecard.pptx
+++ b/generated/Tier 1 Broker Scorecards/Bolanos Commercial Enterprise, LLC_Broker_Scorecard.pptx
@@ -4428,7 +4428,7 @@
                           </a:solidFill>
                           <a:latin typeface="Segoe UI"/>
                         </a:rPr>
-                        <a:t>21</a:t>
+                        <a:t>22</a:t>
                       </a:r>
                     </a:p>
                   </a:txBody>
@@ -4707,7 +4707,7 @@
                           </a:solidFill>
                           <a:latin typeface="Segoe UI"/>
                         </a:rPr>
-                        <a:t>9.5%</a:t>
+                        <a:t>9.1%</a:t>
                       </a:r>
                     </a:p>
                   </a:txBody>

--- a/generated/Tier 1 Broker Scorecards/Bolanos Commercial Enterprise, LLC_Broker_Scorecard.pptx
+++ b/generated/Tier 1 Broker Scorecards/Bolanos Commercial Enterprise, LLC_Broker_Scorecard.pptx
@@ -3394,7 +3394,7 @@
                         <a:rPr sz="900">
                           <a:latin typeface="Segoe UI"/>
                         </a:rPr>
-                        <a:t>Tier 1  |  12.78% / 15.00%</a:t>
+                        <a:t>Tier 1  |  12.03% / 15.00%</a:t>
                       </a:r>
                     </a:p>
                   </a:txBody>
@@ -3690,7 +3690,7 @@
                         <a:rPr sz="900">
                           <a:latin typeface="Segoe UI"/>
                         </a:rPr>
-                        <a:t>Fleet Bound Premium: $44,422.00</a:t>
+                        <a:t>Fleet Bound Premium: $44,959.73</a:t>
                       </a:r>
                     </a:p>
                   </a:txBody>
@@ -3727,7 +3727,7 @@
                         <a:rPr sz="900">
                           <a:latin typeface="Segoe UI"/>
                         </a:rPr>
-                        <a:t>Fleet Book %: 33.0%</a:t>
+                        <a:t>Fleet Book %: 33.4%</a:t>
                       </a:r>
                     </a:p>
                   </a:txBody>
@@ -3766,7 +3766,7 @@
                         <a:rPr sz="900">
                           <a:latin typeface="Segoe UI"/>
                         </a:rPr>
-                        <a:t>Non-Fleet Subs: 129  |  Binds: 16</a:t>
+                        <a:t>Non-Fleet Subs: 129  |  Binds: 15</a:t>
                       </a:r>
                     </a:p>
                   </a:txBody>
@@ -3803,7 +3803,7 @@
                         <a:rPr sz="900">
                           <a:latin typeface="Segoe UI"/>
                         </a:rPr>
-                        <a:t>Non-Fleet Bound Premium: $90,380.81</a:t>
+                        <a:t>Non-Fleet Bound Premium: $89,843.08</a:t>
                       </a:r>
                     </a:p>
                   </a:txBody>
@@ -3840,7 +3840,7 @@
                         <a:rPr sz="900">
                           <a:latin typeface="Segoe UI"/>
                         </a:rPr>
-                        <a:t>Non-Fleet Book %: 67.0%</a:t>
+                        <a:t>Non-Fleet Book %: 66.6%</a:t>
                       </a:r>
                     </a:p>
                   </a:txBody>
@@ -4624,7 +4624,7 @@
                           </a:solidFill>
                           <a:latin typeface="Segoe UI"/>
                         </a:rPr>
-                        <a:t>16.2%</a:t>
+                        <a:t>13.5%</a:t>
                       </a:r>
                     </a:p>
                   </a:txBody>
@@ -4906,7 +4906,7 @@
                           </a:solidFill>
                           <a:latin typeface="Segoe UI"/>
                         </a:rPr>
-                        <a:t>6</a:t>
+                        <a:t>5</a:t>
                       </a:r>
                     </a:p>
                   </a:txBody>

--- a/generated/Tier 1 Broker Scorecards/Bolanos Commercial Enterprise, LLC_Broker_Scorecard.pptx
+++ b/generated/Tier 1 Broker Scorecards/Bolanos Commercial Enterprise, LLC_Broker_Scorecard.pptx
@@ -3394,7 +3394,7 @@
                         <a:rPr sz="900">
                           <a:latin typeface="Segoe UI"/>
                         </a:rPr>
-                        <a:t>Tier 1  |  12.03% / 15.00%</a:t>
+                        <a:t>Tier 1  |  12.78% / 15.00%</a:t>
                       </a:r>
                     </a:p>
                   </a:txBody>
@@ -3690,7 +3690,7 @@
                         <a:rPr sz="900">
                           <a:latin typeface="Segoe UI"/>
                         </a:rPr>
-                        <a:t>Fleet Bound Premium: $44,959.73</a:t>
+                        <a:t>Fleet Bound Premium: $44,422.00</a:t>
                       </a:r>
                     </a:p>
                   </a:txBody>
@@ -3727,7 +3727,7 @@
                         <a:rPr sz="900">
                           <a:latin typeface="Segoe UI"/>
                         </a:rPr>
-                        <a:t>Fleet Book %: 33.4%</a:t>
+                        <a:t>Fleet Book %: 33.0%</a:t>
                       </a:r>
                     </a:p>
                   </a:txBody>
@@ -3766,7 +3766,7 @@
                         <a:rPr sz="900">
                           <a:latin typeface="Segoe UI"/>
                         </a:rPr>
-                        <a:t>Non-Fleet Subs: 129  |  Binds: 15</a:t>
+                        <a:t>Non-Fleet Subs: 129  |  Binds: 16</a:t>
                       </a:r>
                     </a:p>
                   </a:txBody>
@@ -3803,7 +3803,7 @@
                         <a:rPr sz="900">
                           <a:latin typeface="Segoe UI"/>
                         </a:rPr>
-                        <a:t>Non-Fleet Bound Premium: $89,843.08</a:t>
+                        <a:t>Non-Fleet Bound Premium: $90,380.81</a:t>
                       </a:r>
                     </a:p>
                   </a:txBody>
@@ -3840,7 +3840,7 @@
                         <a:rPr sz="900">
                           <a:latin typeface="Segoe UI"/>
                         </a:rPr>
-                        <a:t>Non-Fleet Book %: 66.6%</a:t>
+                        <a:t>Non-Fleet Book %: 67.0%</a:t>
                       </a:r>
                     </a:p>
                   </a:txBody>
@@ -4581,7 +4581,7 @@
                         <a:rPr sz="800">
                           <a:latin typeface="Segoe UI"/>
                         </a:rPr>
-                        <a:t>50.0%</a:t>
+                        <a:t>52.4%</a:t>
                       </a:r>
                     </a:p>
                   </a:txBody>
@@ -4624,7 +4624,7 @@
                           </a:solidFill>
                           <a:latin typeface="Segoe UI"/>
                         </a:rPr>
-                        <a:t>13.5%</a:t>
+                        <a:t>16.2%</a:t>
                       </a:r>
                     </a:p>
                   </a:txBody>
@@ -4866,7 +4866,7 @@
                         <a:rPr sz="800">
                           <a:latin typeface="Segoe UI"/>
                         </a:rPr>
-                        <a:t>21</a:t>
+                        <a:t>22</a:t>
                       </a:r>
                     </a:p>
                   </a:txBody>
@@ -4906,7 +4906,7 @@
                           </a:solidFill>
                           <a:latin typeface="Segoe UI"/>
                         </a:rPr>
-                        <a:t>5</a:t>
+                        <a:t>6</a:t>
                       </a:r>
                     </a:p>
                   </a:txBody>

--- a/generated/Tier 1 Broker Scorecards/Bolanos Commercial Enterprise, LLC_Broker_Scorecard.pptx
+++ b/generated/Tier 1 Broker Scorecards/Bolanos Commercial Enterprise, LLC_Broker_Scorecard.pptx
@@ -3394,7 +3394,7 @@
                         <a:rPr sz="900">
                           <a:latin typeface="Segoe UI"/>
                         </a:rPr>
-                        <a:t>Tier 1  |  12.78% / 15.00%</a:t>
+                        <a:t>Tier 1  |  12.69% / 15.00%</a:t>
                       </a:r>
                     </a:p>
                   </a:txBody>
@@ -3766,7 +3766,7 @@
                         <a:rPr sz="900">
                           <a:latin typeface="Segoe UI"/>
                         </a:rPr>
-                        <a:t>Non-Fleet Subs: 129  |  Binds: 16</a:t>
+                        <a:t>Non-Fleet Subs: 130  |  Binds: 16</a:t>
                       </a:r>
                     </a:p>
                   </a:txBody>
@@ -4428,7 +4428,7 @@
                           </a:solidFill>
                           <a:latin typeface="Segoe UI"/>
                         </a:rPr>
-                        <a:t>22</a:t>
+                        <a:t>23</a:t>
                       </a:r>
                     </a:p>
                   </a:txBody>
@@ -4707,7 +4707,7 @@
                           </a:solidFill>
                           <a:latin typeface="Segoe UI"/>
                         </a:rPr>
-                        <a:t>9.1%</a:t>
+                        <a:t>8.7%</a:t>
                       </a:r>
                     </a:p>
                   </a:txBody>

--- a/generated/Tier 1 Broker Scorecards/Bolanos Commercial Enterprise, LLC_Broker_Scorecard.pptx
+++ b/generated/Tier 1 Broker Scorecards/Bolanos Commercial Enterprise, LLC_Broker_Scorecard.pptx
@@ -3357,7 +3357,7 @@
                         <a:rPr sz="800">
                           <a:latin typeface="Segoe UI"/>
                         </a:rPr>
-                        <a:t>$1,014,499.25 / $752,126.57 / $134,802.81</a:t>
+                        <a:t>$1,014,499.25 / $753,192.80 / $135,869.04</a:t>
                       </a:r>
                     </a:p>
                   </a:txBody>
@@ -3394,7 +3394,7 @@
                         <a:rPr sz="900">
                           <a:latin typeface="Segoe UI"/>
                         </a:rPr>
-                        <a:t>Tier 1  |  12.69% / 15.00%</a:t>
+                        <a:t>Tier 1  |  13.33% / 15.00%</a:t>
                       </a:r>
                     </a:p>
                   </a:txBody>
@@ -3431,7 +3431,7 @@
                         <a:rPr sz="900">
                           <a:latin typeface="Segoe UI"/>
                         </a:rPr>
-                        <a:t>$1,420,298.95  (9.5% achieved)</a:t>
+                        <a:t>$1,420,298.95  (9.6% achieved)</a:t>
                       </a:r>
                     </a:p>
                   </a:txBody>
@@ -3690,7 +3690,7 @@
                         <a:rPr sz="900">
                           <a:latin typeface="Segoe UI"/>
                         </a:rPr>
-                        <a:t>Fleet Bound Premium: $44,422.00</a:t>
+                        <a:t>Fleet Bound Premium: $41,632.96</a:t>
                       </a:r>
                     </a:p>
                   </a:txBody>
@@ -3727,7 +3727,7 @@
                         <a:rPr sz="900">
                           <a:latin typeface="Segoe UI"/>
                         </a:rPr>
-                        <a:t>Fleet Book %: 33.0%</a:t>
+                        <a:t>Fleet Book %: 30.6%</a:t>
                       </a:r>
                     </a:p>
                   </a:txBody>
@@ -3766,7 +3766,7 @@
                         <a:rPr sz="900">
                           <a:latin typeface="Segoe UI"/>
                         </a:rPr>
-                        <a:t>Non-Fleet Subs: 130  |  Binds: 16</a:t>
+                        <a:t>Non-Fleet Subs: 131  |  Binds: 17</a:t>
                       </a:r>
                     </a:p>
                   </a:txBody>
@@ -3803,7 +3803,7 @@
                         <a:rPr sz="900">
                           <a:latin typeface="Segoe UI"/>
                         </a:rPr>
-                        <a:t>Non-Fleet Bound Premium: $90,380.81</a:t>
+                        <a:t>Non-Fleet Bound Premium: $94,236.08</a:t>
                       </a:r>
                     </a:p>
                   </a:txBody>
@@ -3840,7 +3840,7 @@
                         <a:rPr sz="900">
                           <a:latin typeface="Segoe UI"/>
                         </a:rPr>
-                        <a:t>Non-Fleet Book %: 67.0%</a:t>
+                        <a:t>Non-Fleet Book %: 69.4%</a:t>
                       </a:r>
                     </a:p>
                   </a:txBody>
@@ -4428,7 +4428,7 @@
                           </a:solidFill>
                           <a:latin typeface="Segoe UI"/>
                         </a:rPr>
-                        <a:t>23</a:t>
+                        <a:t>24</a:t>
                       </a:r>
                     </a:p>
                   </a:txBody>
@@ -4581,7 +4581,7 @@
                         <a:rPr sz="800">
                           <a:latin typeface="Segoe UI"/>
                         </a:rPr>
-                        <a:t>52.4%</a:t>
+                        <a:t>50.0%</a:t>
                       </a:r>
                     </a:p>
                   </a:txBody>
@@ -4707,7 +4707,7 @@
                           </a:solidFill>
                           <a:latin typeface="Segoe UI"/>
                         </a:rPr>
-                        <a:t>8.7%</a:t>
+                        <a:t>12.5%</a:t>
                       </a:r>
                     </a:p>
                   </a:txBody>
@@ -4866,7 +4866,7 @@
                         <a:rPr sz="800">
                           <a:latin typeface="Segoe UI"/>
                         </a:rPr>
-                        <a:t>22</a:t>
+                        <a:t>21</a:t>
                       </a:r>
                     </a:p>
                   </a:txBody>
@@ -4983,7 +4983,7 @@
                           </a:solidFill>
                           <a:latin typeface="Segoe UI"/>
                         </a:rPr>
-                        <a:t>2</a:t>
+                        <a:t>3</a:t>
                       </a:r>
                     </a:p>
                   </a:txBody>

--- a/generated/Tier 1 Broker Scorecards/Bolanos Commercial Enterprise, LLC_Broker_Scorecard.pptx
+++ b/generated/Tier 1 Broker Scorecards/Bolanos Commercial Enterprise, LLC_Broker_Scorecard.pptx
@@ -3394,7 +3394,7 @@
                         <a:rPr sz="900">
                           <a:latin typeface="Segoe UI"/>
                         </a:rPr>
-                        <a:t>Tier 1  |  13.33% / 15.00%</a:t>
+                        <a:t>Tier 1  |  12.59% / 15.00%</a:t>
                       </a:r>
                     </a:p>
                   </a:txBody>
@@ -3653,7 +3653,7 @@
                         <a:rPr sz="900">
                           <a:latin typeface="Segoe UI"/>
                         </a:rPr>
-                        <a:t>Fleet Subs: 4  |  Binds: 1</a:t>
+                        <a:t>Fleet Subs: 4  |  Binds: 0</a:t>
                       </a:r>
                     </a:p>
                   </a:txBody>
@@ -3690,7 +3690,7 @@
                         <a:rPr sz="900">
                           <a:latin typeface="Segoe UI"/>
                         </a:rPr>
-                        <a:t>Fleet Bound Premium: $41,632.96</a:t>
+                        <a:t>Fleet Bound Premium: $0.00</a:t>
                       </a:r>
                     </a:p>
                   </a:txBody>
@@ -3727,7 +3727,7 @@
                         <a:rPr sz="900">
                           <a:latin typeface="Segoe UI"/>
                         </a:rPr>
-                        <a:t>Fleet Book %: 30.6%</a:t>
+                        <a:t>Fleet Book %: 0.0%</a:t>
                       </a:r>
                     </a:p>
                   </a:txBody>
@@ -3803,7 +3803,7 @@
                         <a:rPr sz="900">
                           <a:latin typeface="Segoe UI"/>
                         </a:rPr>
-                        <a:t>Non-Fleet Bound Premium: $94,236.08</a:t>
+                        <a:t>Non-Fleet Bound Premium: $135,869.04</a:t>
                       </a:r>
                     </a:p>
                   </a:txBody>
@@ -3840,7 +3840,7 @@
                         <a:rPr sz="900">
                           <a:latin typeface="Segoe UI"/>
                         </a:rPr>
-                        <a:t>Non-Fleet Book %: 69.4%</a:t>
+                        <a:t>Non-Fleet Book %: 100.0%</a:t>
                       </a:r>
                     </a:p>
                   </a:txBody>
@@ -4581,7 +4581,7 @@
                         <a:rPr sz="800">
                           <a:latin typeface="Segoe UI"/>
                         </a:rPr>
-                        <a:t>50.0%</a:t>
+                        <a:t>47.6%</a:t>
                       </a:r>
                     </a:p>
                   </a:txBody>
@@ -4707,7 +4707,7 @@
                           </a:solidFill>
                           <a:latin typeface="Segoe UI"/>
                         </a:rPr>
-                        <a:t>12.5%</a:t>
+                        <a:t>8.3%</a:t>
                       </a:r>
                     </a:p>
                   </a:txBody>
@@ -4866,7 +4866,7 @@
                         <a:rPr sz="800">
                           <a:latin typeface="Segoe UI"/>
                         </a:rPr>
-                        <a:t>21</a:t>
+                        <a:t>20</a:t>
                       </a:r>
                     </a:p>
                   </a:txBody>
@@ -4983,7 +4983,7 @@
                           </a:solidFill>
                           <a:latin typeface="Segoe UI"/>
                         </a:rPr>
-                        <a:t>3</a:t>
+                        <a:t>2</a:t>
                       </a:r>
                     </a:p>
                   </a:txBody>

--- a/generated/Tier 1 Broker Scorecards/Bolanos Commercial Enterprise, LLC_Broker_Scorecard.pptx
+++ b/generated/Tier 1 Broker Scorecards/Bolanos Commercial Enterprise, LLC_Broker_Scorecard.pptx
@@ -3357,7 +3357,7 @@
                         <a:rPr sz="800">
                           <a:latin typeface="Segoe UI"/>
                         </a:rPr>
-                        <a:t>$1,014,499.25 / $753,192.80 / $135,869.04</a:t>
+                        <a:t>$1,014,499.25 / $754,161.80 / $136,838.04</a:t>
                       </a:r>
                     </a:p>
                   </a:txBody>
@@ -3394,7 +3394,7 @@
                         <a:rPr sz="900">
                           <a:latin typeface="Segoe UI"/>
                         </a:rPr>
-                        <a:t>Tier 1  |  12.59% / 15.00%</a:t>
+                        <a:t>Tier 1  |  13.33% / 15.00%</a:t>
                       </a:r>
                     </a:p>
                   </a:txBody>
@@ -3766,7 +3766,7 @@
                         <a:rPr sz="900">
                           <a:latin typeface="Segoe UI"/>
                         </a:rPr>
-                        <a:t>Non-Fleet Subs: 131  |  Binds: 17</a:t>
+                        <a:t>Non-Fleet Subs: 131  |  Binds: 18</a:t>
                       </a:r>
                     </a:p>
                   </a:txBody>
@@ -3803,7 +3803,7 @@
                         <a:rPr sz="900">
                           <a:latin typeface="Segoe UI"/>
                         </a:rPr>
-                        <a:t>Non-Fleet Bound Premium: $135,869.04</a:t>
+                        <a:t>Non-Fleet Bound Premium: $136,838.04</a:t>
                       </a:r>
                     </a:p>
                   </a:txBody>
@@ -4707,7 +4707,7 @@
                           </a:solidFill>
                           <a:latin typeface="Segoe UI"/>
                         </a:rPr>
-                        <a:t>8.3%</a:t>
+                        <a:t>12.5%</a:t>
                       </a:r>
                     </a:p>
                   </a:txBody>
@@ -4983,7 +4983,7 @@
                           </a:solidFill>
                           <a:latin typeface="Segoe UI"/>
                         </a:rPr>
-                        <a:t>2</a:t>
+                        <a:t>3</a:t>
                       </a:r>
                     </a:p>
                   </a:txBody>

--- a/generated/Tier 1 Broker Scorecards/Bolanos Commercial Enterprise, LLC_Broker_Scorecard.pptx
+++ b/generated/Tier 1 Broker Scorecards/Bolanos Commercial Enterprise, LLC_Broker_Scorecard.pptx
@@ -3394,7 +3394,7 @@
                         <a:rPr sz="900">
                           <a:latin typeface="Segoe UI"/>
                         </a:rPr>
-                        <a:t>Tier 1  |  13.33% / 15.00%</a:t>
+                        <a:t>Tier 1  |  12.59% / 15.00%</a:t>
                       </a:r>
                     </a:p>
                   </a:txBody>
@@ -3766,7 +3766,7 @@
                         <a:rPr sz="900">
                           <a:latin typeface="Segoe UI"/>
                         </a:rPr>
-                        <a:t>Non-Fleet Subs: 131  |  Binds: 18</a:t>
+                        <a:t>Non-Fleet Subs: 131  |  Binds: 17</a:t>
                       </a:r>
                     </a:p>
                   </a:txBody>
@@ -4581,7 +4581,7 @@
                         <a:rPr sz="800">
                           <a:latin typeface="Segoe UI"/>
                         </a:rPr>
-                        <a:t>47.6%</a:t>
+                        <a:t>50.0%</a:t>
                       </a:r>
                     </a:p>
                   </a:txBody>
@@ -4624,7 +4624,7 @@
                           </a:solidFill>
                           <a:latin typeface="Segoe UI"/>
                         </a:rPr>
-                        <a:t>16.2%</a:t>
+                        <a:t>13.5%</a:t>
                       </a:r>
                     </a:p>
                   </a:txBody>
@@ -4866,7 +4866,7 @@
                         <a:rPr sz="800">
                           <a:latin typeface="Segoe UI"/>
                         </a:rPr>
-                        <a:t>20</a:t>
+                        <a:t>21</a:t>
                       </a:r>
                     </a:p>
                   </a:txBody>
@@ -4906,7 +4906,7 @@
                           </a:solidFill>
                           <a:latin typeface="Segoe UI"/>
                         </a:rPr>
-                        <a:t>6</a:t>
+                        <a:t>5</a:t>
                       </a:r>
                     </a:p>
                   </a:txBody>

--- a/generated/Tier 1 Broker Scorecards/Bolanos Commercial Enterprise, LLC_Broker_Scorecard.pptx
+++ b/generated/Tier 1 Broker Scorecards/Bolanos Commercial Enterprise, LLC_Broker_Scorecard.pptx
@@ -3357,7 +3357,7 @@
                         <a:rPr sz="800">
                           <a:latin typeface="Segoe UI"/>
                         </a:rPr>
-                        <a:t>$1,014,499.25 / $754,161.80 / $136,838.04</a:t>
+                        <a:t>$1,014,499.25 / $659,474.46 / $136,838.04</a:t>
                       </a:r>
                     </a:p>
                   </a:txBody>
@@ -3394,7 +3394,7 @@
                         <a:rPr sz="900">
                           <a:latin typeface="Segoe UI"/>
                         </a:rPr>
-                        <a:t>Tier 1  |  12.59% / 15.00%</a:t>
+                        <a:t>Tier 1  |  13.33% / 15.00%</a:t>
                       </a:r>
                     </a:p>
                   </a:txBody>
@@ -3766,7 +3766,7 @@
                         <a:rPr sz="900">
                           <a:latin typeface="Segoe UI"/>
                         </a:rPr>
-                        <a:t>Non-Fleet Subs: 131  |  Binds: 17</a:t>
+                        <a:t>Non-Fleet Subs: 131  |  Binds: 18</a:t>
                       </a:r>
                     </a:p>
                   </a:txBody>
@@ -4624,7 +4624,7 @@
                           </a:solidFill>
                           <a:latin typeface="Segoe UI"/>
                         </a:rPr>
-                        <a:t>13.5%</a:t>
+                        <a:t>16.2%</a:t>
                       </a:r>
                     </a:p>
                   </a:txBody>
@@ -4906,7 +4906,7 @@
                           </a:solidFill>
                           <a:latin typeface="Segoe UI"/>
                         </a:rPr>
-                        <a:t>5</a:t>
+                        <a:t>6</a:t>
                       </a:r>
                     </a:p>
                   </a:txBody>
